--- a/test-corpus/word-verification/nested-3-levels.pptx
+++ b/test-corpus/word-verification/nested-3-levels.pptx
@@ -144,7 +144,7 @@
         </p:nvSpPr>
         <p:spPr>
           <a:xfrm>
-            <a:off x="3472085" y="1028700"/>
+            <a:off x="1350677" y="1028700"/>
             <a:ext cx="742170" cy="1441190"/>
           </a:xfrm>
           <a:prstGeom prst="rect">
@@ -171,7 +171,7 @@
         </p:nvSpPr>
         <p:spPr>
           <a:xfrm>
-            <a:off x="3472085" y="1028700"/>
+            <a:off x="1350677" y="1028700"/>
             <a:ext cx="742170" cy="103559"/>
           </a:xfrm>
           <a:prstGeom prst="rect">
@@ -213,7 +213,7 @@
         </p:nvSpPr>
         <p:spPr>
           <a:xfrm>
-            <a:off x="3409950" y="2815085"/>
+            <a:off x="1288542" y="2815085"/>
             <a:ext cx="866440" cy="1441190"/>
           </a:xfrm>
           <a:prstGeom prst="rect">
@@ -240,7 +240,7 @@
         </p:nvSpPr>
         <p:spPr>
           <a:xfrm>
-            <a:off x="3409950" y="2815085"/>
+            <a:off x="1288542" y="2815085"/>
             <a:ext cx="866440" cy="103559"/>
           </a:xfrm>
           <a:prstGeom prst="rect">
@@ -282,7 +282,7 @@
         </p:nvSpPr>
         <p:spPr>
           <a:xfrm>
-            <a:off x="3472085" y="4601470"/>
+            <a:off x="1350677" y="4601470"/>
             <a:ext cx="742170" cy="1441190"/>
           </a:xfrm>
           <a:prstGeom prst="rect">
@@ -309,7 +309,7 @@
         </p:nvSpPr>
         <p:spPr>
           <a:xfrm>
-            <a:off x="3472085" y="4601470"/>
+            <a:off x="1350677" y="4601470"/>
             <a:ext cx="742170" cy="103559"/>
           </a:xfrm>
           <a:prstGeom prst="rect">
@@ -351,7 +351,7 @@
         </p:nvSpPr>
         <p:spPr>
           <a:xfrm>
-            <a:off x="3692147" y="1304856"/>
+            <a:off x="1570739" y="1304856"/>
             <a:ext cx="302046" cy="323620"/>
           </a:xfrm>
           <a:prstGeom prst="rect">
@@ -419,7 +419,7 @@
         </p:nvSpPr>
         <p:spPr>
           <a:xfrm>
-            <a:off x="3644683" y="1973672"/>
+            <a:off x="1523275" y="1973672"/>
             <a:ext cx="396974" cy="323620"/>
           </a:xfrm>
           <a:prstGeom prst="rect">
@@ -487,7 +487,7 @@
         </p:nvSpPr>
         <p:spPr>
           <a:xfrm>
-            <a:off x="3613615" y="3091241"/>
+            <a:off x="1492207" y="3091241"/>
             <a:ext cx="459110" cy="323620"/>
           </a:xfrm>
           <a:prstGeom prst="rect">
@@ -555,7 +555,7 @@
         </p:nvSpPr>
         <p:spPr>
           <a:xfrm>
-            <a:off x="3582548" y="3760057"/>
+            <a:off x="1461140" y="3760057"/>
             <a:ext cx="521245" cy="323620"/>
           </a:xfrm>
           <a:prstGeom prst="rect">
@@ -623,7 +623,7 @@
         </p:nvSpPr>
         <p:spPr>
           <a:xfrm>
-            <a:off x="3644683" y="4877626"/>
+            <a:off x="1523275" y="4877626"/>
             <a:ext cx="396974" cy="323620"/>
           </a:xfrm>
           <a:prstGeom prst="rect">
@@ -691,7 +691,7 @@
         </p:nvSpPr>
         <p:spPr>
           <a:xfrm>
-            <a:off x="3675750" y="5546442"/>
+            <a:off x="1554342" y="5546442"/>
             <a:ext cx="334839" cy="323620"/>
           </a:xfrm>
           <a:prstGeom prst="rect">
@@ -759,7 +759,7 @@
         </p:nvSpPr>
         <p:spPr>
           <a:xfrm>
-            <a:off x="3644683" y="6077180"/>
+            <a:off x="1523275" y="6077180"/>
             <a:ext cx="396974" cy="323620"/>
           </a:xfrm>
           <a:prstGeom prst="rect">
@@ -830,7 +830,7 @@
         </p:nvCxnSpPr>
         <p:spPr>
           <a:xfrm>
-            <a:off x="3843170" y="1628477"/>
+            <a:off x="1721762" y="1628477"/>
             <a:ext cx="0" cy="345195"/>
           </a:xfrm>
           <a:prstGeom prst="line">
@@ -870,7 +870,7 @@
         </p:nvCxnSpPr>
         <p:spPr>
           <a:xfrm>
-            <a:off x="3843170" y="3414862"/>
+            <a:off x="1721762" y="3414862"/>
             <a:ext cx="0" cy="345195"/>
           </a:xfrm>
           <a:prstGeom prst="line">
@@ -910,7 +910,7 @@
         </p:nvCxnSpPr>
         <p:spPr>
           <a:xfrm>
-            <a:off x="3843170" y="5201247"/>
+            <a:off x="1721762" y="5201247"/>
             <a:ext cx="0" cy="345195"/>
           </a:xfrm>
           <a:prstGeom prst="line">
@@ -950,7 +950,7 @@
         </p:nvCxnSpPr>
         <p:spPr>
           <a:xfrm>
-            <a:off x="3843170" y="4083677"/>
+            <a:off x="1721762" y="4083677"/>
             <a:ext cx="0" cy="793949"/>
           </a:xfrm>
           <a:prstGeom prst="line">
@@ -990,7 +990,7 @@
         </p:nvCxnSpPr>
         <p:spPr>
           <a:xfrm>
-            <a:off x="3843170" y="2297292"/>
+            <a:off x="1721762" y="2297292"/>
             <a:ext cx="0" cy="793949"/>
           </a:xfrm>
           <a:prstGeom prst="line">
@@ -1030,7 +1030,7 @@
         </p:nvCxnSpPr>
         <p:spPr>
           <a:xfrm>
-            <a:off x="3843170" y="5870062"/>
+            <a:off x="1721762" y="5870062"/>
             <a:ext cx="0" cy="207118"/>
           </a:xfrm>
           <a:prstGeom prst="line">
@@ -1059,6 +1059,205 @@
           </a:fontRef>
         </p:style>
       </p:cxnSp>
+      <p:sp>
+        <p:nvSpPr>
+          <p:cNvPr id="4" name="Mermaid source"/>
+          <p:cNvSpPr/>
+          <p:nvPr/>
+        </p:nvSpPr>
+        <p:spPr>
+          <a:xfrm>
+            <a:off x="7674864" y="1028700"/>
+            <a:ext cx="4059936" cy="5372100"/>
+          </a:xfrm>
+          <a:prstGeom prst="rect">
+            <a:avLst/>
+          </a:prstGeom>
+          <a:solidFill>
+            <a:srgbClr val="F3F4F6"/>
+          </a:solidFill>
+          <a:ln w="9525">
+            <a:solidFill>
+              <a:srgbClr val="D1D5DB"/>
+            </a:solidFill>
+          </a:ln>
+        </p:spPr>
+        <p:txBody>
+          <a:bodyPr wrap="square" lIns="91440" tIns="45720" rIns="91440" bIns="45720" anchor="t">
+            <a:noAutofit/>
+          </a:bodyPr>
+          <a:lstStyle/>
+          <a:p>
+            <a:pPr algn="l"/>
+            <a:r>
+              <a:rPr lang="en-US" sz="1400" dirty="0">
+                <a:solidFill>
+                  <a:srgbClr val="1F2937"/>
+                </a:solidFill>
+                <a:latin typeface="Consolas"/>
+                <a:cs typeface="Consolas"/>
+              </a:rPr>
+              <a:t>flowchart TD</a:t>
+            </a:r>
+          </a:p>
+          <a:p>
+            <a:pPr algn="l"/>
+            <a:r>
+              <a:rPr lang="en-US" sz="1400" dirty="0">
+                <a:solidFill>
+                  <a:srgbClr val="1F2937"/>
+                </a:solidFill>
+                <a:latin typeface="Consolas"/>
+                <a:cs typeface="Consolas"/>
+              </a:rPr>
+              <a:t>    subgraph L1[Niveau 1]</a:t>
+            </a:r>
+          </a:p>
+          <a:p>
+            <a:pPr algn="l"/>
+            <a:r>
+              <a:rPr lang="en-US" sz="1400" dirty="0">
+                <a:solidFill>
+                  <a:srgbClr val="1F2937"/>
+                </a:solidFill>
+                <a:latin typeface="Consolas"/>
+                <a:cs typeface="Consolas"/>
+              </a:rPr>
+              <a:t>        A[Un] --&gt; B[Deux]</a:t>
+            </a:r>
+          </a:p>
+          <a:p>
+            <a:pPr algn="l"/>
+            <a:r>
+              <a:rPr lang="en-US" sz="1400" dirty="0">
+                <a:solidFill>
+                  <a:srgbClr val="1F2937"/>
+                </a:solidFill>
+                <a:latin typeface="Consolas"/>
+                <a:cs typeface="Consolas"/>
+              </a:rPr>
+              <a:t>        subgraph L2[Niveau 2]</a:t>
+            </a:r>
+          </a:p>
+          <a:p>
+            <a:pPr algn="l"/>
+            <a:r>
+              <a:rPr lang="en-US" sz="1400" dirty="0">
+                <a:solidFill>
+                  <a:srgbClr val="1F2937"/>
+                </a:solidFill>
+                <a:latin typeface="Consolas"/>
+                <a:cs typeface="Consolas"/>
+              </a:rPr>
+              <a:t>            C[Trois] --&gt; D[Quatre]</a:t>
+            </a:r>
+          </a:p>
+          <a:p>
+            <a:pPr algn="l"/>
+            <a:r>
+              <a:rPr lang="en-US" sz="1400" dirty="0">
+                <a:solidFill>
+                  <a:srgbClr val="1F2937"/>
+                </a:solidFill>
+                <a:latin typeface="Consolas"/>
+                <a:cs typeface="Consolas"/>
+              </a:rPr>
+              <a:t>            subgraph L3[Niveau 3]</a:t>
+            </a:r>
+          </a:p>
+          <a:p>
+            <a:pPr algn="l"/>
+            <a:r>
+              <a:rPr lang="en-US" sz="1400" dirty="0">
+                <a:solidFill>
+                  <a:srgbClr val="1F2937"/>
+                </a:solidFill>
+                <a:latin typeface="Consolas"/>
+                <a:cs typeface="Consolas"/>
+              </a:rPr>
+              <a:t>                E[Cinq] --&gt; F[Six]</a:t>
+            </a:r>
+          </a:p>
+          <a:p>
+            <a:pPr algn="l"/>
+            <a:r>
+              <a:rPr lang="en-US" sz="1400" dirty="0">
+                <a:solidFill>
+                  <a:srgbClr val="1F2937"/>
+                </a:solidFill>
+                <a:latin typeface="Consolas"/>
+                <a:cs typeface="Consolas"/>
+              </a:rPr>
+              <a:t>            end</a:t>
+            </a:r>
+          </a:p>
+          <a:p>
+            <a:pPr algn="l"/>
+            <a:r>
+              <a:rPr lang="en-US" sz="1400" dirty="0">
+                <a:solidFill>
+                  <a:srgbClr val="1F2937"/>
+                </a:solidFill>
+                <a:latin typeface="Consolas"/>
+                <a:cs typeface="Consolas"/>
+              </a:rPr>
+              <a:t>            D --&gt; E</a:t>
+            </a:r>
+          </a:p>
+          <a:p>
+            <a:pPr algn="l"/>
+            <a:r>
+              <a:rPr lang="en-US" sz="1400" dirty="0">
+                <a:solidFill>
+                  <a:srgbClr val="1F2937"/>
+                </a:solidFill>
+                <a:latin typeface="Consolas"/>
+                <a:cs typeface="Consolas"/>
+              </a:rPr>
+              <a:t>        end</a:t>
+            </a:r>
+          </a:p>
+          <a:p>
+            <a:pPr algn="l"/>
+            <a:r>
+              <a:rPr lang="en-US" sz="1400" dirty="0">
+                <a:solidFill>
+                  <a:srgbClr val="1F2937"/>
+                </a:solidFill>
+                <a:latin typeface="Consolas"/>
+                <a:cs typeface="Consolas"/>
+              </a:rPr>
+              <a:t>        B --&gt; C</a:t>
+            </a:r>
+          </a:p>
+          <a:p>
+            <a:pPr algn="l"/>
+            <a:r>
+              <a:rPr lang="en-US" sz="1400" dirty="0">
+                <a:solidFill>
+                  <a:srgbClr val="1F2937"/>
+                </a:solidFill>
+                <a:latin typeface="Consolas"/>
+                <a:cs typeface="Consolas"/>
+              </a:rPr>
+              <a:t>    end</a:t>
+            </a:r>
+          </a:p>
+          <a:p>
+            <a:pPr algn="l"/>
+            <a:r>
+              <a:rPr lang="en-US" sz="1400" dirty="0">
+                <a:solidFill>
+                  <a:srgbClr val="1F2937"/>
+                </a:solidFill>
+                <a:latin typeface="Consolas"/>
+                <a:cs typeface="Consolas"/>
+              </a:rPr>
+              <a:t>    F --&gt; G[Sept]</a:t>
+            </a:r>
+          </a:p>
+        </p:txBody>
+      </p:sp>
     </p:spTree>
   </p:cSld>
   <p:clrMapOvr>
